--- a/atolye_icerik/sunumlar/03_unity_cli_ortak.pptx
+++ b/atolye_icerik/sunumlar/03_unity_cli_ortak.pptx
@@ -6852,7 +6852,7 @@
                 <a:ea typeface="Arial" pitchFamily="34" charset="-122"/>
                 <a:cs typeface="Arial" pitchFamily="34" charset="-120"/>
               </a:rPr>
-              <a:t>13:30'da iki iz: mühendislik bu akışı kendisi uygular, sanat üretim hattını kurar.</a:t>
+              <a:t>Tek eğitmenle art arda iki iz: 13:30 mühendislik, 15:15 sanat — dileyen diğer izi izleyici olarak takip eder.</a:t>
             </a:r>
             <a:endParaRPr lang="en-US" sz="3000" dirty="0"/>
           </a:p>
